--- a/SE - L01 - Software and Software Engineering_updated.pptx
+++ b/SE - L01 - Software and Software Engineering_updated.pptx
@@ -2,27 +2,27 @@
 <file path=ppt/presentation.xml><?xml version="1.0" encoding="utf-8"?>
 <p:presentation xmlns:a="http://schemas.openxmlformats.org/drawingml/2006/main" xmlns:r="http://schemas.openxmlformats.org/officeDocument/2006/relationships" xmlns:p="http://schemas.openxmlformats.org/presentationml/2006/main" showSpecialPlsOnTitleSld="0" autoCompressPictures="0">
   <p:sldMasterIdLst>
-    <p:sldMasterId id="2147483648" r:id="rId1"/>
+    <p:sldMasterId id="2147483648" r:id="rId4"/>
   </p:sldMasterIdLst>
   <p:notesMasterIdLst>
-    <p:notesMasterId r:id="rId17"/>
+    <p:notesMasterId r:id="rId20"/>
   </p:notesMasterIdLst>
   <p:sldIdLst>
-    <p:sldId id="256" r:id="rId2"/>
-    <p:sldId id="313" r:id="rId3"/>
-    <p:sldId id="293" r:id="rId4"/>
-    <p:sldId id="295" r:id="rId5"/>
-    <p:sldId id="297" r:id="rId6"/>
-    <p:sldId id="314" r:id="rId7"/>
-    <p:sldId id="299" r:id="rId8"/>
-    <p:sldId id="300" r:id="rId9"/>
-    <p:sldId id="298" r:id="rId10"/>
-    <p:sldId id="307" r:id="rId11"/>
-    <p:sldId id="308" r:id="rId12"/>
-    <p:sldId id="309" r:id="rId13"/>
-    <p:sldId id="310" r:id="rId14"/>
-    <p:sldId id="312" r:id="rId15"/>
-    <p:sldId id="311" r:id="rId16"/>
+    <p:sldId id="256" r:id="rId5"/>
+    <p:sldId id="313" r:id="rId6"/>
+    <p:sldId id="293" r:id="rId7"/>
+    <p:sldId id="295" r:id="rId8"/>
+    <p:sldId id="297" r:id="rId9"/>
+    <p:sldId id="314" r:id="rId10"/>
+    <p:sldId id="299" r:id="rId11"/>
+    <p:sldId id="300" r:id="rId12"/>
+    <p:sldId id="298" r:id="rId13"/>
+    <p:sldId id="307" r:id="rId14"/>
+    <p:sldId id="308" r:id="rId15"/>
+    <p:sldId id="309" r:id="rId16"/>
+    <p:sldId id="310" r:id="rId17"/>
+    <p:sldId id="312" r:id="rId18"/>
+    <p:sldId id="311" r:id="rId19"/>
   </p:sldIdLst>
   <p:sldSz cx="12192000" cy="6858000"/>
   <p:notesSz cx="6858000" cy="9144000"/>
@@ -606,7 +606,7 @@
             <a:fld id="{31210FD6-79C5-4041-8E7A-89350618D070}" type="datetimeFigureOut">
               <a:rPr lang="en-GB" smtClean="0"/>
               <a:pPr/>
-              <a:t>07/02/2026</a:t>
+              <a:t>21/02/2026</a:t>
             </a:fld>
             <a:endParaRPr lang="en-GB"/>
           </a:p>
@@ -1485,7 +1485,7 @@
             <a:fld id="{4FFDFDB9-D628-4A18-8BA7-33EF406917E6}" type="datetime1">
               <a:rPr lang="en-US" smtClean="0"/>
               <a:pPr/>
-              <a:t>2/7/2026</a:t>
+              <a:t>2/21/2026</a:t>
             </a:fld>
             <a:endParaRPr lang="en-US" dirty="0"/>
           </a:p>
@@ -1744,7 +1744,7 @@
             <a:fld id="{F5B11AF3-EEF6-43B0-9CB4-662539EFD2B2}" type="datetime1">
               <a:rPr lang="en-US" smtClean="0"/>
               <a:pPr/>
-              <a:t>2/7/2026</a:t>
+              <a:t>2/21/2026</a:t>
             </a:fld>
             <a:endParaRPr lang="en-US" dirty="0"/>
           </a:p>
@@ -1976,7 +1976,7 @@
             <a:fld id="{071272FE-5A2D-492A-8166-5DAA8B18B7EA}" type="datetime1">
               <a:rPr lang="en-US" smtClean="0"/>
               <a:pPr/>
-              <a:t>2/7/2026</a:t>
+              <a:t>2/21/2026</a:t>
             </a:fld>
             <a:endParaRPr lang="en-US" dirty="0"/>
           </a:p>
@@ -2213,7 +2213,7 @@
             <a:fld id="{01DDDB41-4229-47AF-BA03-C191A66FB94C}" type="datetime1">
               <a:rPr lang="en-US" smtClean="0"/>
               <a:pPr/>
-              <a:t>2/7/2026</a:t>
+              <a:t>2/21/2026</a:t>
             </a:fld>
             <a:endParaRPr lang="en-US" dirty="0"/>
           </a:p>
@@ -2524,7 +2524,7 @@
             <a:fld id="{BC08422A-3B8F-4FAB-94E1-75E89E1391CC}" type="datetime1">
               <a:rPr lang="en-US" smtClean="0"/>
               <a:pPr/>
-              <a:t>2/7/2026</a:t>
+              <a:t>2/21/2026</a:t>
             </a:fld>
             <a:endParaRPr lang="en-US" dirty="0"/>
           </a:p>
@@ -2823,7 +2823,7 @@
             <a:fld id="{0E7392D4-64E7-470C-9229-F729BA72710A}" type="datetime1">
               <a:rPr lang="en-US" smtClean="0"/>
               <a:pPr/>
-              <a:t>2/7/2026</a:t>
+              <a:t>2/21/2026</a:t>
             </a:fld>
             <a:endParaRPr lang="en-US" dirty="0"/>
           </a:p>
@@ -3242,7 +3242,7 @@
             <a:fld id="{13ECD79C-F41C-4E95-A4BE-2712B8C4A412}" type="datetime1">
               <a:rPr lang="en-US" smtClean="0"/>
               <a:pPr/>
-              <a:t>2/7/2026</a:t>
+              <a:t>2/21/2026</a:t>
             </a:fld>
             <a:endParaRPr lang="en-US" dirty="0"/>
           </a:p>
@@ -3401,7 +3401,7 @@
             <a:fld id="{D3AAE8F3-6A5D-412D-87FA-D951F64E80C1}" type="datetime1">
               <a:rPr lang="en-US" smtClean="0"/>
               <a:pPr/>
-              <a:t>2/7/2026</a:t>
+              <a:t>2/21/2026</a:t>
             </a:fld>
             <a:endParaRPr lang="en-US" dirty="0"/>
           </a:p>
@@ -3493,7 +3493,7 @@
             <a:fld id="{690F486A-D265-402A-B6CD-5D626FC3EDC7}" type="datetime1">
               <a:rPr lang="en-US" smtClean="0"/>
               <a:pPr/>
-              <a:t>2/7/2026</a:t>
+              <a:t>2/21/2026</a:t>
             </a:fld>
             <a:endParaRPr lang="en-US" dirty="0"/>
           </a:p>
@@ -3868,7 +3868,7 @@
             <a:fld id="{C7416B92-2D29-4309-8FD4-8EC023BBFD61}" type="datetime1">
               <a:rPr lang="en-US" smtClean="0"/>
               <a:pPr/>
-              <a:t>2/7/2026</a:t>
+              <a:t>2/21/2026</a:t>
             </a:fld>
             <a:endParaRPr lang="en-US" dirty="0"/>
           </a:p>
@@ -4154,7 +4154,7 @@
             <a:fld id="{A4484BAD-8657-4978-A2B2-B1BBE7089EFE}" type="datetime1">
               <a:rPr lang="en-US" smtClean="0"/>
               <a:pPr/>
-              <a:t>2/7/2026</a:t>
+              <a:t>2/21/2026</a:t>
             </a:fld>
             <a:endParaRPr lang="en-US" dirty="0"/>
           </a:p>
@@ -4362,7 +4362,7 @@
             <a:fld id="{B46415B1-2572-4F4E-AFA0-B4063C44FA40}" type="datetime1">
               <a:rPr lang="en-US" smtClean="0"/>
               <a:pPr/>
-              <a:t>2/7/2026</a:t>
+              <a:t>2/21/2026</a:t>
             </a:fld>
             <a:endParaRPr lang="en-US" dirty="0"/>
           </a:p>
@@ -5378,12 +5378,20 @@
           <a:p>
             <a:pPr algn="ctr"/>
             <a:r>
-              <a:rPr lang="en-US" sz="2400">
+              <a:rPr lang="en-US" sz="2400" dirty="0" err="1">
                 <a:solidFill>
                   <a:srgbClr val="FFFFFF"/>
                 </a:solidFill>
               </a:rPr>
-              <a:t>Software engineering (Undergraduate)</a:t>
+              <a:t>Softwareengineering</a:t>
+            </a:r>
+            <a:r>
+              <a:rPr lang="en-US" sz="2400" dirty="0">
+                <a:solidFill>
+                  <a:srgbClr val="FFFFFF"/>
+                </a:solidFill>
+              </a:rPr>
+              <a:t> (Undergraduate)</a:t>
             </a:r>
           </a:p>
         </p:txBody>
@@ -6169,13 +6177,26 @@
               </a:rPr>
             </a:br>
             <a:r>
-              <a:rPr lang="en-US" sz="3000" dirty="0">
+              <a:rPr lang="en-US" sz="3000" dirty="0" err="1">
                 <a:solidFill>
                   <a:schemeClr val="tx2"/>
                 </a:solidFill>
               </a:rPr>
-              <a:t>software &amp; software engineering</a:t>
-            </a:r>
+              <a:t>sftware</a:t>
+            </a:r>
+            <a:r>
+              <a:rPr lang="en-US" sz="3000">
+                <a:solidFill>
+                  <a:schemeClr val="tx2"/>
+                </a:solidFill>
+              </a:rPr>
+              <a:t> </a:t>
+            </a:r>
+            <a:endParaRPr lang="en-US" sz="3000" dirty="0">
+              <a:solidFill>
+                <a:schemeClr val="tx2"/>
+              </a:solidFill>
+            </a:endParaRPr>
           </a:p>
         </p:txBody>
       </p:sp>
@@ -12206,6 +12227,15 @@
 </file>
 
 <file path=customXml/item1.xml><?xml version="1.0" encoding="utf-8"?>
+<?mso-contentType ?>
+<FormTemplates xmlns="http://schemas.microsoft.com/sharepoint/v3/contenttype/forms">
+  <Display>DocumentLibraryForm</Display>
+  <Edit>DocumentLibraryForm</Edit>
+  <New>DocumentLibraryForm</New>
+</FormTemplates>
+</file>
+
+<file path=customXml/item2.xml><?xml version="1.0" encoding="utf-8"?>
 <ct:contentTypeSchema xmlns:ct="http://schemas.microsoft.com/office/2006/metadata/contentType" xmlns:ma="http://schemas.microsoft.com/office/2006/metadata/properties/metaAttributes" ct:_="" ma:_="" ma:contentTypeName="Document" ma:contentTypeID="0x010100D7C1B08CE58D0E4DB7DCF78F42E3FEBF" ma:contentTypeVersion="3" ma:contentTypeDescription="Create a new document." ma:contentTypeScope="" ma:versionID="757dbd7693dedb3ffd0ef762adf4c17f">
   <xsd:schema xmlns:xsd="http://www.w3.org/2001/XMLSchema" xmlns:xs="http://www.w3.org/2001/XMLSchema" xmlns:p="http://schemas.microsoft.com/office/2006/metadata/properties" xmlns:ns2="76186025-a0d9-4e7f-b068-4d7f27a934af" targetNamespace="http://schemas.microsoft.com/office/2006/metadata/properties" ma:root="true" ma:fieldsID="4e47dd67fc0f33d87798bdaf03a981ee" ns2:_="">
     <xsd:import namespace="76186025-a0d9-4e7f-b068-4d7f27a934af"/>
@@ -12343,15 +12373,6 @@
 </ct:contentTypeSchema>
 </file>
 
-<file path=customXml/item2.xml><?xml version="1.0" encoding="utf-8"?>
-<?mso-contentType ?>
-<FormTemplates xmlns="http://schemas.microsoft.com/sharepoint/v3/contenttype/forms">
-  <Display>DocumentLibraryForm</Display>
-  <Edit>DocumentLibraryForm</Edit>
-  <New>DocumentLibraryForm</New>
-</FormTemplates>
-</file>
-
 <file path=customXml/item3.xml><?xml version="1.0" encoding="utf-8"?>
 <p:properties xmlns:p="http://schemas.microsoft.com/office/2006/metadata/properties" xmlns:xsi="http://www.w3.org/2001/XMLSchema-instance" xmlns:pc="http://schemas.microsoft.com/office/infopath/2007/PartnerControls">
   <documentManagement/>
@@ -12359,13 +12380,36 @@
 </file>
 
 <file path=customXml/itemProps1.xml><?xml version="1.0" encoding="utf-8"?>
-<ds:datastoreItem xmlns:ds="http://schemas.openxmlformats.org/officeDocument/2006/customXml" ds:itemID="{AF8173B7-CFC2-43B7-88CD-B28B5E0F5A25}"/>
+<ds:datastoreItem xmlns:ds="http://schemas.openxmlformats.org/officeDocument/2006/customXml" ds:itemID="{1E442A45-7256-445F-9761-000702145F14}">
+  <ds:schemaRefs>
+    <ds:schemaRef ds:uri="http://schemas.microsoft.com/sharepoint/v3/contenttype/forms"/>
+  </ds:schemaRefs>
+</ds:datastoreItem>
 </file>
 
 <file path=customXml/itemProps2.xml><?xml version="1.0" encoding="utf-8"?>
-<ds:datastoreItem xmlns:ds="http://schemas.openxmlformats.org/officeDocument/2006/customXml" ds:itemID="{1E442A45-7256-445F-9761-000702145F14}"/>
+<ds:datastoreItem xmlns:ds="http://schemas.openxmlformats.org/officeDocument/2006/customXml" ds:itemID="{AF8173B7-CFC2-43B7-88CD-B28B5E0F5A25}">
+  <ds:schemaRefs>
+    <ds:schemaRef ds:uri="http://schemas.microsoft.com/office/2006/metadata/contentType"/>
+    <ds:schemaRef ds:uri="http://schemas.microsoft.com/office/2006/metadata/properties/metaAttributes"/>
+    <ds:schemaRef ds:uri="http://www.w3.org/2001/XMLSchema"/>
+    <ds:schemaRef ds:uri="http://schemas.microsoft.com/office/2006/metadata/properties"/>
+    <ds:schemaRef ds:uri="76186025-a0d9-4e7f-b068-4d7f27a934af"/>
+    <ds:schemaRef ds:uri="http://schemas.microsoft.com/office/2006/documentManagement/types"/>
+    <ds:schemaRef ds:uri="http://schemas.microsoft.com/office/infopath/2007/PartnerControls"/>
+    <ds:schemaRef ds:uri="http://schemas.openxmlformats.org/package/2006/metadata/core-properties"/>
+    <ds:schemaRef ds:uri="http://purl.org/dc/elements/1.1/"/>
+    <ds:schemaRef ds:uri="http://purl.org/dc/terms/"/>
+    <ds:schemaRef ds:uri="http://schemas.microsoft.com/internal/obd"/>
+  </ds:schemaRefs>
+</ds:datastoreItem>
 </file>
 
 <file path=customXml/itemProps3.xml><?xml version="1.0" encoding="utf-8"?>
-<ds:datastoreItem xmlns:ds="http://schemas.openxmlformats.org/officeDocument/2006/customXml" ds:itemID="{8F78E800-144F-4D1A-8F2D-6743E29689FE}"/>
+<ds:datastoreItem xmlns:ds="http://schemas.openxmlformats.org/officeDocument/2006/customXml" ds:itemID="{8F78E800-144F-4D1A-8F2D-6743E29689FE}">
+  <ds:schemaRefs>
+    <ds:schemaRef ds:uri="http://schemas.microsoft.com/office/2006/metadata/properties"/>
+    <ds:schemaRef ds:uri="http://schemas.microsoft.com/office/infopath/2007/PartnerControls"/>
+  </ds:schemaRefs>
+</ds:datastoreItem>
 </file>